--- a/docs/AutoScaleSim_Lab_Presentation.pptx
+++ b/docs/AutoScaleSim_Lab_Presentation.pptx
@@ -120,7 +120,7 @@
   <p:extLst>
     <p:ext uri="{521415D9-36F7-43E2-AB2F-B90AF26B5E84}">
       <p14:sectionLst xmlns:p14="http://schemas.microsoft.com/office/powerpoint/2010/main">
-        <p14:section name="Introduction" id="{9cd9eb40-7768-b488-a355-f2144e57315f}">
+        <p14:section name="Introduction" id="{01e717c2-ba10-1303-85fa-0b40dd63bdc5}">
           <p14:sldIdLst>
             <p14:sldId id="256"/>
             <p14:sldId id="257"/>
@@ -128,31 +128,31 @@
             <p14:sldId id="259"/>
           </p14:sldIdLst>
         </p14:section>
-        <p14:section name="Reproduction" id="{6d210b9b-e583-0736-9f5f-c56ca51d371d}">
+        <p14:section name="Reproduction" id="{8335ec63-a97a-a356-f072-8d8f288f1b66}">
           <p14:sldIdLst>
             <p14:sldId id="260"/>
           </p14:sldIdLst>
         </p14:section>
-        <p14:section name="Budget guard" id="{016afa30-cc82-1f6c-73ae-0b4c22005bb2}">
+        <p14:section name="Budget guard" id="{7bc70548-1dda-58bb-ebae-b231db0a8553}">
           <p14:sldIdLst>
             <p14:sldId id="261"/>
             <p14:sldId id="262"/>
             <p14:sldId id="263"/>
           </p14:sldIdLst>
         </p14:section>
-        <p14:section name="Workloads and forecasting" id="{dcb39993-babc-8bfb-19da-9eba95aec888}">
+        <p14:section name="Workloads and forecasting" id="{c9192e3b-898e-0de9-9f13-ff2610add2b1}">
           <p14:sldIdLst>
             <p14:sldId id="264"/>
             <p14:sldId id="265"/>
           </p14:sldIdLst>
         </p14:section>
-        <p14:section name="System" id="{593bb9ed-2d6b-df72-61f4-bc25fb4e65af}">
+        <p14:section name="System" id="{4b938410-64d4-6a46-1678-3b62d6c746e1}">
           <p14:sldIdLst>
             <p14:sldId id="266"/>
             <p14:sldId id="267"/>
           </p14:sldIdLst>
         </p14:section>
-        <p14:section name="Conclusion" id="{89d56382-5f49-8170-2f35-87b4e4f66a5f}">
+        <p14:section name="Conclusion" id="{7706ded6-78ee-881a-e3df-413a08c1eba3}">
           <p14:sldIdLst>
             <p14:sldId id="268"/>
             <p14:sldId id="269"/>
@@ -1626,16 +1626,16 @@
                 <c:formatCode>General</c:formatCode>
                 <c:ptCount val="4"/>
                 <c:pt idx="0">
-                  <c:v>11.447</c:v>
+                  <c:v>11.424</c:v>
                 </c:pt>
                 <c:pt idx="1">
-                  <c:v>9.696</c:v>
+                  <c:v>9.609</c:v>
                 </c:pt>
                 <c:pt idx="2">
-                  <c:v>8.64</c:v>
+                  <c:v>8.341</c:v>
                 </c:pt>
                 <c:pt idx="3">
-                  <c:v>16.44</c:v>
+                  <c:v>13.469</c:v>
                 </c:pt>
               </c:numCache>
             </c:numRef>
@@ -2468,7 +2468,7 @@
           <a:p>
             <a:r>
               <a:rPr lang="en-US" dirty="0"/>
-              <a:t>Forecast accuracy: Holt-Winters is far better than same-time-yesterday, and slightly better than last-value on two of the three real weeks at thirty minutes, roughly equal on the third. Spike warnings catch about half the spikes but with many false alarms, and a sudden synthetic flash crowd is mostly unpredictable thirty minutes ahead. Capacity estimates land within two VMs of what the simulator used. So: useful for planning, not a reliable spike oracle.</a:t>
+              <a:t>Forecast accuracy: Holt-Winters is far better than same-time-yesterday, and better than last-value at thirty and sixty minutes on all three real weeks. The fit is burst-robust: a one-off spike of up to an hour is kept out of the trend and the daily season, so it is not predicted again tomorrow; an earlier version without this flagged every future bucket as a spike after a single burst. Spike warnings catch roughly 40 to 60 percent of real spikes with many false alarms, and a sudden synthetic flash crowd is mostly unpredictable thirty minutes ahead. Capacity estimates land within two VMs of what the simulator used. So: useful for planning, not a reliable spike oracle.</a:t>
             </a:r>
             <a:endParaRPr lang="en-US" dirty="0"/>
           </a:p>
@@ -4409,7 +4409,7 @@
                 <a:ea typeface="Cambria" pitchFamily="34" charset="-122"/>
                 <a:cs typeface="Cambria" pitchFamily="34" charset="-120"/>
               </a:rPr>
-              <a:t>0.43–0.58</a:t>
+              <a:t>0.37–0.58</a:t>
             </a:r>
             <a:endParaRPr lang="en-US" sz="4400" dirty="0"/>
           </a:p>
@@ -4487,7 +4487,7 @@
                 <a:ea typeface="Cambria" pitchFamily="34" charset="-122"/>
                 <a:cs typeface="Cambria" pitchFamily="34" charset="-120"/>
               </a:rPr>
-              <a:t>0.10–0.21</a:t>
+              <a:t>0.11–0.21</a:t>
             </a:r>
             <a:endParaRPr lang="en-US" sz="4400" dirty="0"/>
           </a:p>
@@ -5021,7 +5021,7 @@
                 <a:ea typeface="Cambria" pitchFamily="34" charset="-122"/>
                 <a:cs typeface="Cambria" pitchFamily="34" charset="-120"/>
               </a:rPr>
-              <a:t>46 / 46</a:t>
+              <a:t>54 / 54</a:t>
             </a:r>
             <a:endParaRPr lang="en-US" sz="4400" dirty="0"/>
           </a:p>
@@ -7999,7 +7999,7 @@
                 <a:ea typeface="Calibri" pitchFamily="34" charset="-122"/>
                 <a:cs typeface="Calibri" pitchFamily="34" charset="-120"/>
               </a:rPr>
-              <a:t>46 JUnit tests, evaluation command</a:t>
+              <a:t>54 JUnit tests, evaluation command</a:t>
             </a:r>
             <a:endParaRPr lang="en-US" sz="1600" dirty="0"/>
           </a:p>
